--- a/EPS_RI/ro/fisiere/C01.pptx
+++ b/EPS_RI/ro/fisiere/C01.pptx
@@ -4992,7 +4992,7 @@
                 <a:ea typeface="Palatino Linotype" pitchFamily="34" charset="-122"/>
                 <a:cs typeface="Palatino Linotype" pitchFamily="34" charset="-120"/>
               </a:rPr>
-              <a:t>Pregătirea pentru rezonanță</a:t>
+              <a:t>Pregătirea pentru examenul RMN</a:t>
             </a:r>
             <a:endParaRPr lang="en-US" sz="3600" dirty="0"/>
           </a:p>
@@ -5268,7 +5268,7 @@
                 <a:ea typeface="Palatino Linotype" pitchFamily="34" charset="-122"/>
                 <a:cs typeface="Palatino Linotype" pitchFamily="34" charset="-120"/>
               </a:rPr>
-              <a:t>Programat la o rezonanță magnetică, în ziua examinării.</a:t>
+              <a:t>Programat pentru un examen RMN, în ziua examinării.</a:t>
             </a:r>
             <a:endParaRPr lang="en-US" sz="1900" dirty="0"/>
           </a:p>
@@ -10442,7 +10442,7 @@
                 <a:ea typeface="Palatino Linotype" pitchFamily="34" charset="-122"/>
                 <a:cs typeface="Palatino Linotype" pitchFamily="34" charset="-120"/>
               </a:rPr>
-              <a:t>„pacienții să fie mai bine pregătiți pentru tomografie”</a:t>
+              <a:t>„pacienții să fie mai bine pregătiți pentru examenul CT”</a:t>
             </a:r>
             <a:endParaRPr lang="en-US" sz="2000" dirty="0"/>
           </a:p>
@@ -11310,7 +11310,7 @@
                 <a:ea typeface="Palatino Linotype" pitchFamily="34" charset="-122"/>
                 <a:cs typeface="Palatino Linotype" pitchFamily="34" charset="-120"/>
               </a:rPr>
-              <a:t>„pacienții să fie mai bine pregătiți pentru tomografie”</a:t>
+              <a:t>„pacienții să fie mai bine pregătiți pentru examenul CT”</a:t>
             </a:r>
             <a:endParaRPr lang="en-US" sz="2700" dirty="0"/>
           </a:p>
@@ -11498,7 +11498,7 @@
                 <a:ea typeface="Palatino Linotype" pitchFamily="34" charset="-122"/>
                 <a:cs typeface="Palatino Linotype" pitchFamily="34" charset="-120"/>
               </a:rPr>
-              <a:t>S-a lovit la cap. Medicul de gardă a cerut o tomografie.</a:t>
+              <a:t>S-a lovit la cap. Medicul de gardă a cerut un examen prin tomografie computerizată (CT).</a:t>
             </a:r>
             <a:endParaRPr lang="en-US" sz="2300" dirty="0"/>
           </a:p>
@@ -13916,7 +13916,7 @@
                 <a:ea typeface="Palatino Linotype" pitchFamily="34" charset="-122"/>
                 <a:cs typeface="Palatino Linotype" pitchFamily="34" charset="-120"/>
               </a:rPr>
-              <a:t>Ce combinație de abordări ați folosi pentru pregătirea la tomografie?</a:t>
+              <a:t>Ce combinație de abordări ați folosi ca să pregătiți pacienții pentru examenul CT?</a:t>
             </a:r>
             <a:endParaRPr lang="en-US" sz="1900" dirty="0"/>
           </a:p>
@@ -15604,7 +15604,7 @@
                 <a:ea typeface="Palatino Linotype" pitchFamily="34" charset="-122"/>
                 <a:cs typeface="Palatino Linotype" pitchFamily="34" charset="-120"/>
               </a:rPr>
-              <a:t>MAMA ȘI TOMOGRAFIA · CIFRELE</a:t>
+              <a:t>MAMA ȘI EXAMENUL CT · CIFRELE</a:t>
             </a:r>
             <a:endParaRPr lang="en-US" sz="1300" dirty="0"/>
           </a:p>
@@ -15822,7 +15822,7 @@
                 <a:ea typeface="Palatino Linotype" pitchFamily="34" charset="-122"/>
                 <a:cs typeface="Palatino Linotype" pitchFamily="34" charset="-120"/>
               </a:rPr>
-              <a:t>de tomografii ale capului, la copii sub 10 ani: în 10 ani, un caz în plus de leucemie și unul de tumoră cerebrală.</a:t>
+              <a:t>de examene CT ale capului, la copii sub 10 ani: în 10 ani, un caz în plus de leucemie și unul de tumoră cerebrală.</a:t>
             </a:r>
             <a:endParaRPr lang="en-US" sz="2000" dirty="0"/>
           </a:p>
@@ -15900,7 +15900,7 @@
                 <a:ea typeface="Palatino Linotype" pitchFamily="34" charset="-122"/>
                 <a:cs typeface="Palatino Linotype" pitchFamily="34" charset="-120"/>
               </a:rPr>
-              <a:t>Studiu britanic, cohortă retrospectivă, publicat în 2012: pacienți la care prima tomografie se făcuse înainte de 22 de ani.</a:t>
+              <a:t>Studiu britanic, cohortă retrospectivă, publicat în 2012: pacienți la care primul examen CT se făcuse înainte de 22 de ani.</a:t>
             </a:r>
             <a:endParaRPr lang="en-US" sz="1000" dirty="0"/>
           </a:p>
@@ -22184,7 +22184,7 @@
                 <a:ea typeface="Palatino Linotype" pitchFamily="34" charset="-122"/>
                 <a:cs typeface="Palatino Linotype" pitchFamily="34" charset="-120"/>
               </a:rPr>
-              <a:t>Titlul dă riscul relativ și ascunde riscul absolut: un caz în plus de leucemie și unul de tumoră cerebrală la 10 000 de tomografii ale capului, la copiii sub 10 ani, în 10 ani.</a:t>
+              <a:t>Titlul dă riscul relativ și ascunde riscul absolut: un caz în plus de leucemie și unul de tumoră cerebrală la 10 000 de examene CT ale capului, la copiii sub 10 ani, în 10 ani.</a:t>
             </a:r>
             <a:endParaRPr lang="en-US" sz="1650" dirty="0"/>
           </a:p>
@@ -25245,7 +25245,7 @@
                 <a:ea typeface="Palatino Linotype" pitchFamily="34" charset="-122"/>
                 <a:cs typeface="Palatino Linotype" pitchFamily="34" charset="-120"/>
               </a:rPr>
-              <a:t>Pacientul programat la rezonanța magnetică</a:t>
+              <a:t>Pacientul și examenul prin rezonanță magnetică (RMN)</a:t>
             </a:r>
             <a:endParaRPr lang="en-US" sz="3100" dirty="0"/>
           </a:p>
